--- a/presentation/UNanofabTools/flaskserver/slides/08-IoT-API-Endpoints.pptx
+++ b/presentation/UNanofabTools/flaskserver/slides/08-IoT-API-Endpoints.pptx
@@ -1305,7 +1305,7 @@
           <a:p>
             <a:r>
               <a:rPr lang="en-US" dirty="0"/>
-              <a:t>One nice pattern worth calling out. The Parylene coater samples many times per second, so rather than send each point, the Pi groups them into numbered batches. The server stashes each batch in a temporary folder and, once it has them all (or the Pi says the run is finished), concatenates them into a single clean CSV for that run. It's a sensible way to handle a fast, chatty data source over a network.</a:t>
+              <a:t>One nice pattern worth calling out. The Parylene coater samples many times per second, so rather than send each point, the Pi groups them into numbered batches, each tagged with a session ID. The server stashes each batch in a temporary folder named after that ID and, once it has them all (or the Pi says the run is finished), concatenates them into a single clean CSV for that run. Because that ID becomes a folder name, the server strictly validates it first — only letters, digits, underscore, or hyphen are allowed, so a sneaky value like '../..' is rejected before any file is written and can't be used to write outside the data folder. It's a sensible way to handle a fast, chatty data source over a network, safely.</a:t>
             </a:r>
             <a:endParaRPr lang="en-US" dirty="0"/>
           </a:p>
@@ -6433,7 +6433,7 @@
                 <a:ea typeface="Calibri" pitchFamily="34" charset="-122"/>
                 <a:cs typeface="Calibri" pitchFamily="34" charset="-120"/>
               </a:rPr>
-              <a:t>The server saves each batch to a temporary folder.</a:t>
+              <a:t>Each batch carries a session ID naming its temporary folder.</a:t>
             </a:r>
             <a:endParaRPr lang="en-US" sz="1500" dirty="0"/>
           </a:p>
@@ -6454,7 +6454,7 @@
                 <a:ea typeface="Calibri" pitchFamily="34" charset="-122"/>
                 <a:cs typeface="Calibri" pitchFamily="34" charset="-120"/>
               </a:rPr>
-              <a:t>When all batches arrive (or the Pi signals 'done'), it combines them.</a:t>
+              <a:t>That ID is strictly validated (letters/digits only) so it can't escape the data folder.</a:t>
             </a:r>
             <a:endParaRPr lang="en-US" sz="1500" dirty="0"/>
           </a:p>
@@ -6475,7 +6475,7 @@
                 <a:ea typeface="Calibri" pitchFamily="34" charset="-122"/>
                 <a:cs typeface="Calibri" pitchFamily="34" charset="-120"/>
               </a:rPr>
-              <a:t>The result is one tidy CSV per coating run.</a:t>
+              <a:t>When all batches arrive (or the Pi signals 'done'), it combines them into one tidy CSV per run.</a:t>
             </a:r>
             <a:endParaRPr lang="en-US" sz="1500" dirty="0"/>
           </a:p>
